--- a/document/21_발표자료.pptx
+++ b/document/21_발표자료.pptx
@@ -1308,7 +1308,7 @@
           <a:p>
             <a:r>
               <a:rPr lang="en-US" dirty="0"/>
-              <a:t>안녕하세요, 심기일전입니다. 저희는 로봇 손 AI Hand가 수신호를 직접 시범 보이고, 카메라가 학습자의 손을 판정하고, 로봇이 결과를 몸으로 되돌려주는 산업 안전 수신호 교육 키트 SafeSign PhysicalAI를 만들었습니다. 오른쪽은 실제 교육장 키트의 판정 화면입니다.</a:t>
+              <a:t>안녕하세요, 심기일전입니다. 저희는 로봇 손이 수신호를 시범 보이고, 카메라가 학습자의 손을 판정하고, 로봇이 결과를 몸으로 돌려주는 산업 안전 수신호 교육 키트 SafeSign PhysicalAI를 만들었습니다. 오른쪽은 실제 판정 화면입니다.</a:t>
             </a:r>
             <a:endParaRPr lang="en-US" dirty="0"/>
           </a:p>
@@ -1396,7 +1396,7 @@
           <a:p>
             <a:r>
               <a:rPr lang="en-US" dirty="0"/>
-              <a:t>마지막으로 한계입니다. AI Hand의 엄지 서보가 고장 나 엄지 하나로 갈리는 두 쌍은 로봇 손 시범만으로 구별하기 어렵고, 화면 안내로 보완하고 있습니다. 판정과 KPI에는 영향이 없습니다. 또 평가자 세 명이 모두 팀원이라 현장 작업자 의견은 시연 자리에서 받을 예정이고, 오분류 0%는 표본상 1.8% 이하로 읽어야 해서 시행 수를 늘릴 계획입니다. 역할은 오른쪽과 같이 나눴습니다. 감사합니다. (역할 문구는 발표 전 팀 확인)</a:t>
+              <a:t>한계입니다. 미판정 10건 중 7건이 손을 오른쪽으로 기울인 자세여서, 기울기 보정을 새 데이터로 확인할 계획입니다. 평가자가 모두 팀원이라 현장 작업자 의견은 시연 자리에서 받고, 오분류 0%는 표본상 1.8% 이하로 읽어야 해서 시행 수를 늘릴 계획입니다. 역할은 오른쪽과 같습니다. 감사합니다. (역할 문구는 발표 전 팀 확인)</a:t>
             </a:r>
             <a:endParaRPr lang="en-US" dirty="0"/>
           </a:p>
@@ -1484,7 +1484,7 @@
           <a:p>
             <a:r>
               <a:rPr lang="en-US" dirty="0"/>
-              <a:t>먼저 문제입니다. 현장에서는 작업자마다 수신호를 다르게 이해하고 표현해서 소통 오류가 사고로 이어질 수 있습니다. 그런데 지금의 교육은 영상이나 인쇄물이라, 학습자가 실제로 따라 할 수 있는지 확인할 수 없고, 교육자도 누가 어떤 수신호에 약한지 숫자로 알 수 없습니다. 그래서 저희는 보여 주고, 판정하고, 몸으로 돌려주고, 기록을 남기는 네 가지를 목표로 잡았습니다.</a:t>
+              <a:t>현장에서는 작업자마다 수신호를 다르게 이해해서 소통 오류가 사고로 이어질 수 있습니다. 그런데 지금 교육은 영상과 인쇄물이라, 학습자가 실제로 따라 할 수 있는지, 누가 어떤 신호에 약한지 알 수 없습니다. 그래서 보여 주고, 판정하고, 몸으로 돌려주고, 기록하는 것을 목표로 잡았습니다.</a:t>
             </a:r>
             <a:endParaRPr lang="en-US" dirty="0"/>
           </a:p>
@@ -1572,7 +1572,7 @@
           <a:p>
             <a:r>
               <a:rPr lang="en-US" dirty="0"/>
-              <a:t>해결 방법은 닫힌 루프입니다. AI Hand가 수신호를 시범 보이면, 학습자가 확인 버튼을 누르고 카메라 앞에서 따라 합니다. 카메라가 손 관절을 읽어 판정하고, 정답이면 picar가 실제로 그 신호대로 움직이고 micro:bit에 O가 뜹니다. 틀리면 AI Hand가 다시 시범을 보이고, 세 번까지 기회를 줍니다. 인식 결과가 로봇의 움직임으로 돌아온다는 점이 이 프로젝트가 피지컬 AI인 이유입니다.</a:t>
+              <a:t>해결 방법은 닫힌 루프입니다. AI Hand가 시범을 보이면 학습자가 확인 버튼을 누르고 따라 합니다. 정답이면 picar가 그 신호대로 움직이고 micro:bit에 O가 뜹니다. 틀리면 다시 시범을 보이고 세 번까지 기회를 줍니다. 인식 결과가 로봇의 움직임으로 돌아온다는 점이 피지컬 AI인 이유입니다.</a:t>
             </a:r>
             <a:endParaRPr lang="en-US" dirty="0"/>
           </a:p>
@@ -1660,7 +1660,7 @@
           <a:p>
             <a:r>
               <a:rPr lang="en-US" dirty="0"/>
-              <a:t>시스템은 보드 두 대입니다. 학습자 앞에 고정된 라즈베리파이 5에 카메라가 직결돼 있고, 여기서 인식과 판정, 교육 화면, AI Hand 제어가 돌아갑니다. AI Hand는 micro:bit가 BLE로 명령을 받아 서보를 움직이고, picar는 별도의 라즈베리파이 4B가 Wi-Fi로 명령을 받아 주행합니다. 보드를 나눈 이유는 picar가 달리면 카메라도 같이 움직이기 때문이고, BLE로 바꾼 이유는 micro:bit의 UART가 하나뿐이라 서보를 켜면 USB 시리얼이 끊겼기 때문입니다. 둘 다 실제로 부딪혀서 바꾼 결정입니다.</a:t>
+              <a:t>보드는 두 대입니다. 학습자 앞에 고정된 라즈베리파이 5에서 카메라, 인식과 판정, 교육 화면, AI Hand 제어가 돌아가고, AI Hand는 micro:bit가 BLE로, picar는 라즈베리파이 4B가 Wi-Fi로 명령을 받습니다. 보드를 나눈 건 picar가 달리면 카메라도 같이 움직이기 때문이고, BLE로 바꾼 건 서보를 켜면 USB 시리얼이 끊겼기 때문입니다. 둘 다 실제로 부딪혀서 바꾼 결정입니다.</a:t>
             </a:r>
             <a:endParaRPr lang="en-US" dirty="0"/>
           </a:p>
@@ -1748,7 +1748,7 @@
           <a:p>
             <a:r>
               <a:rPr lang="en-US" dirty="0"/>
-              <a:t>인식은 MediaPipe로 손 관절 21점을 뽑고, 왼손 오른손을 통일해 정규화한 뒤 관절 각도와 거리로 특징 23개를 만듭니다. SVM이 7종 확률을 내면, 예측한 수신호의 분포에서 멀거나 확률이 0.75 미만인 경우는 오답이 아니라 미판정으로 보류하고 '다시 해 주세요'라고 안내합니다. 같은 결과가 3프레임 연속일 때만 판정을 확정합니다. 딥러닝 대신 SVM을 고른 이유는 데이터가 적어도 되고, 라즈베리파이에서 실시간으로 돌고, 판정 이유를 설명할 수 있기 때문입니다.</a:t>
+              <a:t>MediaPipe로 손 관절 21점을 뽑고, 관절 각도와 거리로 특징 23개를 만들어 SVM이 7종을 분류합니다. 확률이 0.75 미만이거나 학습 분포에서 먼 손은 오답 대신 미판정으로 보류하고 다시 해 달라고 안내하며, 3프레임 연속 같을 때만 확정합니다. SVM을 고른 이유는 데이터가 적어도 되고, 라즈베리파이에서 실시간으로 돌고, 판정 이유를 설명할 수 있어서입니다.</a:t>
             </a:r>
             <a:endParaRPr lang="en-US" dirty="0"/>
           </a:p>
@@ -1836,7 +1836,7 @@
           <a:p>
             <a:r>
               <a:rPr lang="en-US" dirty="0"/>
-              <a:t>교육 과정은 수신호 7종입니다. 산업·건설 현장에서 쓰는 크레인 작업표준신호 5종에 후진과 주의 2종을 더했습니다. 그림은 실제 측정 촬영에서 뽑은 손 관절 21점이고, 주황 점이 편 손가락 끝입니다. 사람이 따라 하기 어려운 손모양이나 공개 데이터가 없는 손모양은 바꿨습니다. 예를 들어 우회전 유도는 약지 대신 소지, 확인 완료는 엄지 세우기 대신 주먹입니다.</a:t>
+              <a:t>수신호는 크레인 작업표준신호 5종에 후진과 주의를 더한 7종입니다. 그림은 실제 측정 촬영에서 뽑은 손 관절이고, 주황 점이 편 손가락 끝입니다. 따라 하기 어렵거나 공개 데이터가 없는 손모양은 바꿨습니다. 예를 들어 확인 완료는 엄지 세우기 대신 주먹입니다.</a:t>
             </a:r>
             <a:endParaRPr lang="en-US" dirty="0"/>
           </a:p>
@@ -1924,7 +1924,7 @@
           <a:p>
             <a:r>
               <a:rPr lang="en-US" dirty="0"/>
-              <a:t>실물 시험에서 부딪혀서 고친 것들입니다. 9월 25일 시험에서 수신호가 바뀌자마자 방금 맞힌 손모양이 다음 신호의 오답으로 잡혀서, 시범과 판정을 확인 버튼으로 나눴습니다. 틀리기만 하면 끝나지 않던 문제는 시도 3회와 10초 제한으로 해결했습니다. picar 모터가 안 돌아도 화면이 정상으로 보이던 조용한 실패는 장치 응답을 끝까지 확인하고 화면에 상태를 표시하게 했습니다. 마지막으로, 처음 98.81%로 나온 정확도가 같은 촬영분이 학습과 평가에 섞여 부풀려진 것이라는 걸 찾아, 촬영 세션 단위 평가로 바꿨습니다.</a:t>
+              <a:t>실물 시험에서 고친 것들입니다. 수신호가 바뀌자마자 방금 맞힌 손모양이 다음 신호의 오답으로 잡혀서, 시범과 판정을 확인 버튼으로 나눴습니다. 끝나지 않던 교육은 시도 3회와 10초 제한으로, 모터가 멈춰도 화면은 정상이던 조용한 실패는 장치 응답 확인과 상태 표시로 고쳤습니다. 그리고 98.81%로 나온 정확도가 같은 촬영분이 학습과 평가에 섞여 부풀려진 것을 찾아, 촬영 세션 단위 평가로 바꿨습니다.</a:t>
             </a:r>
             <a:endParaRPr lang="en-US" dirty="0"/>
           </a:p>
@@ -2012,7 +2012,7 @@
           <a:p>
             <a:r>
               <a:rPr lang="en-US" dirty="0"/>
-              <a:t>결과입니다. 학습에 쓰지 않은 팀원 3명의 210시도로 쟀습니다. 가장 중요한 오분류율은 0%, 즉 다른 신호로 잘못 읽은 경우가 한 번도 없었고, 가장 위험한 '정지'를 다른 신호로 읽는 치명 오분류도 0건입니다. 정답률 95.2%, 미판정 4.8%, Macro F1 0.974로 판정 KPI 다섯 개를 모두 달성했습니다. 다만 정답률과 미판정률은 신뢰구간이 목표선에 걸쳐 있어 보고서에는 잠정 달성으로 적었습니다. 오른쪽 그래프처럼 미판정은 후진에 몰려 있고, 전부 틀린 답 대신 보류한 경우입니다.</a:t>
+              <a:t>결과입니다. 학습에 쓰지 않은 팀원 3명의 210시도로 쟀습니다. 오분류율은 0%로 다른 신호로 잘못 읽은 경우가 한 번도 없었고, 가장 위험한 정지를 다른 신호로 읽는 치명 오분류도 0건입니다. 정답률 95.2%, 미판정 4.8%, Macro F1 0.974로 판정 KPI 다섯 개를 모두 달성했습니다. 다만 정답률과 미판정률은 신뢰구간이 목표선에 걸쳐 있어 잠정 달성으로 적었습니다.</a:t>
             </a:r>
             <a:endParaRPr lang="en-US" dirty="0"/>
           </a:p>
@@ -2100,7 +2100,7 @@
           <a:p>
             <a:r>
               <a:rPr lang="en-US" dirty="0"/>
-              <a:t>지연도 10월 2일 실제 장비로 쟀습니다. 정답 91시도에서 판정 지연 P95는 0.046초로 목표 1초의 20분의 1 수준이고, 판정이 확정된 뒤 picar와 micro:bit가 반응을 시작하기까지 P95는 0.089초입니다. 표본 수를 고려한 95% 상한으로도 0.065초와 0.262초라 목표를 넉넉히 만족합니다. 동작이 끝나는 시점까지 보면 약 1.1초, 손을 멈춘 순간부터 따져도 1.2에서 1.4초로 2초 안입니다.</a:t>
+              <a:t>지연은 10월 2일 실제 장비로 정답 91시도를 쟀습니다. 판정 지연 P95는 0.046초로 목표 1초의 20분의 1이고, 판정 뒤 picar와 micro:bit가 반응을 시작하기까지 P95는 0.089초입니다. 95% 상한으로도 목표 안이고, 손을 멈춘 순간부터 동작이 끝날 때까지 따져도 1.2에서 1.4초로 2초 안입니다.</a:t>
             </a:r>
             <a:endParaRPr lang="en-US" dirty="0"/>
           </a:p>
@@ -3408,7 +3408,7 @@
                 <a:ea typeface="Malgun Gothic" pitchFamily="34" charset="-122"/>
                 <a:cs typeface="Malgun Gothic" pitchFamily="34" charset="-120"/>
               </a:rPr>
-              <a:t>AI Hand 엄지 서보 고장</a:t>
+              <a:t>기울인 손 과차단</a:t>
             </a:r>
             <a:endParaRPr lang="ko-KR" sz="1500" dirty="0"/>
           </a:p>
@@ -3450,7 +3450,7 @@
                 <a:ea typeface="Malgun Gothic" pitchFamily="34" charset="-122"/>
                 <a:cs typeface="Malgun Gothic" pitchFamily="34" charset="-120"/>
               </a:rPr>
-              <a:t>좌회전 유도↔후진, 우회전 유도↔주의를 로봇 손 시범으로 구별하기 어렵습니다. 화면 안내로 보완하며, 판정과 KPI에는 영향이 없습니다.</a:t>
+              <a:t>미판정 10건 중 7건이 손을 오른쪽으로 기울인 자세였습니다. 기울기 보정은 새 평가 데이터로 다시 재서 확인합니다.</a:t>
             </a:r>
             <a:endParaRPr lang="ko-KR" sz="1150" dirty="0"/>
           </a:p>

--- a/document/21_발표자료.pptx
+++ b/document/21_발표자료.pptx
@@ -1395,10 +1395,8 @@
           <a:lstStyle/>
           <a:p>
             <a:r>
-              <a:rPr lang="en-US" dirty="0"/>
-              <a:t>한계입니다. 미판정 10건 중 7건이 손을 오른쪽으로 기울인 자세여서, 기울기 보정을 새 데이터로 확인할 계획입니다. 평가자가 모두 팀원이라 현장 작업자 의견은 시연 자리에서 받고, 오분류 0%는 표본상 1.8% 이하로 읽어야 해서 시행 수를 늘릴 계획입니다. 역할은 오른쪽과 같습니다. 감사합니다. (역할 문구는 발표 전 팀 확인)</a:t>
-            </a:r>
-            <a:endParaRPr lang="en-US" dirty="0"/>
+              <a:t>한계입니다. 미판정 10건 중 7건이 손을 오른쪽으로 기울인 자세여서, 기울기 보정을 새 데이터로 확인할 계획입니다. 평가자가 모두 팀원이라 현장 작업자 의견은 시연 자리에서 받고, 오분류 0%는 표본상 1.8% 이하, 치명 오분류 0건은 11.4% 이하로 읽어야 해서 시행 수를 늘릴 계획입니다. 역할은 오른쪽과 같습니다. 감사합니다. (역할 문구는 발표 전 팀 확인)</a:t>
+            </a:r>
           </a:p>
         </p:txBody>
       </p:sp>
@@ -1571,10 +1569,8 @@
           <a:lstStyle/>
           <a:p>
             <a:r>
-              <a:rPr lang="en-US" dirty="0"/>
-              <a:t>해결 방법은 닫힌 루프입니다. AI Hand가 시범을 보이면 학습자가 확인 버튼을 누르고 따라 합니다. 정답이면 picar가 그 신호대로 움직이고 micro:bit에 O가 뜹니다. 틀리면 다시 시범을 보이고 세 번까지 기회를 줍니다. 인식 결과가 로봇의 움직임으로 돌아온다는 점이 피지컬 AI인 이유입니다.</a:t>
-            </a:r>
-            <a:endParaRPr lang="en-US" dirty="0"/>
+              <a:t>해결 방법은 닫힌 루프입니다. AI Hand가 시범을 보이면 학습자가 확인 버튼을 누르고 따라 합니다. 정답이면 picar가 그 신호대로 움직이고 micro:bit에 O가 뜹니다. 틀리면 micro:bit에 X가 뜨고, AI Hand가 잡고 있는 시범 자세를 다시 보며 세 번까지 따라 할 수 있습니다. AI Hand는 시범 전용이라 판정 뒤에는 움직이지 않습니다. 인식 결과가 로봇의 움직임으로 돌아온다는 점이 피지컬 AI인 이유입니다.</a:t>
+            </a:r>
           </a:p>
         </p:txBody>
       </p:sp>
@@ -1835,10 +1831,8 @@
           <a:lstStyle/>
           <a:p>
             <a:r>
-              <a:rPr lang="en-US" dirty="0"/>
-              <a:t>수신호는 크레인 작업표준신호 5종에 후진과 주의를 더한 7종입니다. 그림은 실제 측정 촬영에서 뽑은 손 관절이고, 주황 점이 편 손가락 끝입니다. 따라 하기 어렵거나 공개 데이터가 없는 손모양은 바꿨습니다. 예를 들어 확인 완료는 엄지 세우기 대신 주먹입니다.</a:t>
-            </a:r>
-            <a:endParaRPr lang="en-US" dirty="0"/>
+              <a:t>수신호는 크레인 작업표준신호지침의 5종을 손 모양으로 재해석하고 후진과 주의를 더한 7종입니다. 표준은 팔 동작이라 그대로 옮긴 것은 아니고, 서행과 확인 완료는 표준 동작과 다릅니다. 학습 데이터는 공개 ASL 지문자 데이터셋에서 손 모양만 빌려 왔습니다. 그림은 실제 측정 촬영에서 뽑은 손 관절이고, 주황 점이 편 손가락 끝입니다. 따라 하기 어렵거나 공개 데이터가 없는 손모양은 바꿨습니다. 예를 들어 확인 완료는 엄지 세우기 대신 주먹입니다.</a:t>
+            </a:r>
           </a:p>
         </p:txBody>
       </p:sp>
@@ -2011,10 +2005,8 @@
           <a:lstStyle/>
           <a:p>
             <a:r>
-              <a:rPr lang="en-US" dirty="0"/>
-              <a:t>결과입니다. 학습에 쓰지 않은 팀원 3명의 210시도로 쟀습니다. 오분류율은 0%로 다른 신호로 잘못 읽은 경우가 한 번도 없었고, 가장 위험한 정지를 다른 신호로 읽는 치명 오분류도 0건입니다. 정답률 95.2%, 미판정 4.8%, Macro F1 0.974로 판정 KPI 다섯 개를 모두 달성했습니다. 다만 정답률과 미판정률은 신뢰구간이 목표선에 걸쳐 있어 잠정 달성으로 적었습니다.</a:t>
-            </a:r>
-            <a:endParaRPr lang="en-US" dirty="0"/>
+              <a:t>결과입니다. 학습에 쓰지 않은 팀원 3명의 210시도로 쟀습니다. 오분류율은 0%로 다른 신호로 잘못 읽은 경우가 한 번도 없었고, 가장 위험한 정지를 다른 신호로 읽는 치명 오분류도 0건입니다. 정답률 95.2%, 미판정 4.8%, Macro F1 0.974로 판정 KPI 다섯 개 모두 목표를 충족했습니다. 다만 정답률과 미판정률은 신뢰구간이 목표선에 걸쳐 있고, 치명 오분류 0건은 정지 30시도뿐이라 95% 상한이 11.4%여서, 이 세 개는 잠정 달성으로 적었습니다.</a:t>
+            </a:r>
           </a:p>
         </p:txBody>
       </p:sp>
@@ -2099,10 +2091,8 @@
           <a:lstStyle/>
           <a:p>
             <a:r>
-              <a:rPr lang="en-US" dirty="0"/>
-              <a:t>지연은 10월 2일 실제 장비로 정답 91시도를 쟀습니다. 판정 지연 P95는 0.046초로 목표 1초의 20분의 1이고, 판정 뒤 picar와 micro:bit가 반응을 시작하기까지 P95는 0.089초입니다. 95% 상한으로도 목표 안이고, 손을 멈춘 순간부터 동작이 끝날 때까지 따져도 1.2에서 1.4초로 2초 안입니다.</a:t>
-            </a:r>
-            <a:endParaRPr lang="en-US" dirty="0"/>
+              <a:t>지연은 10월 2일 실제 장비로 정답 91시도를 쟀습니다. 판정 지연 P95는 0.046초로 목표 1초의 20분의 1이고, 판정 뒤 picar와 micro:bit가 반응을 시작하기까지 P95는 0.089초입니다. 95% 상한으로도 목표 안입니다. 240fps 슬로모션으로 7시도를 직접 세어 보니 손을 멈춘 뒤 반응 시작까지 0.14에서 0.24초, picar 주행을 뺀 동작 완료까지 약 1.1에서 1.2초였습니다.</a:t>
+            </a:r>
           </a:p>
         </p:txBody>
       </p:sp>
@@ -2838,7 +2828,7 @@
                 <a:ea typeface="Malgun Gothic" pitchFamily="34" charset="-122"/>
                 <a:cs typeface="Malgun Gothic" pitchFamily="34" charset="-120"/>
               </a:rPr>
-              <a:t>판정 KPI</a:t>
+              <a:t>KPI (3개 잠정)</a:t>
             </a:r>
             <a:endParaRPr lang="ko-KR" sz="1100" dirty="0"/>
           </a:p>
@@ -3710,7 +3700,7 @@
                 <a:ea typeface="Malgun Gothic" pitchFamily="34" charset="-122"/>
                 <a:cs typeface="Malgun Gothic" pitchFamily="34" charset="-120"/>
               </a:rPr>
-              <a:t>‘0%’가 아니라 ‘1.8% 이하’로 읽어야 합니다. 외부인 시행을 늘려 구간을 좁힙니다.</a:t>
+              <a:t>‘0%’가 아니라 ‘1.8% 이하’로, 치명 오분류 0건은 ‘11.4% 이하’로 읽어야 합니다. 외부인 시행을 늘려 구간을 좁힙니다.</a:t>
             </a:r>
             <a:endParaRPr lang="ko-KR" sz="1150" dirty="0"/>
           </a:p>
@@ -5877,7 +5867,7 @@
                 <a:ea typeface="Malgun Gothic" pitchFamily="34" charset="-122"/>
                 <a:cs typeface="Malgun Gothic" pitchFamily="34" charset="-120"/>
               </a:rPr>
-              <a:t>정답이면 picar가 그 신호대로 움직이고 micro:bit에 O가 뜹니다. 오답이면 AI Hand가 다시 시범합니다.</a:t>
+              <a:t>정답이면 picar가 그 신호대로 움직이고 micro:bit에 O가 뜹니다. 오답이면 micro:bit에 X가 뜨고, AI Hand가 잡고 있는 시범 자세를 보며 다시 따라 합니다.</a:t>
             </a:r>
             <a:endParaRPr lang="ko-KR" sz="1200" dirty="0"/>
           </a:p>
@@ -7549,7 +7539,7 @@
                 <a:ea typeface="Malgun Gothic" pitchFamily="34" charset="-122"/>
                 <a:cs typeface="Malgun Gothic" pitchFamily="34" charset="-120"/>
               </a:rPr>
-              <a:t>수신호 7종: 크레인 작업표준신호 5종 + 자체 지정 2종</a:t>
+              <a:t>수신호 7종: 크레인 표준 재해석 5종 + 자체 지정 2종</a:t>
             </a:r>
             <a:endParaRPr lang="ko-KR" sz="3000" dirty="0"/>
           </a:p>
@@ -7588,7 +7578,7 @@
                 <a:ea typeface="Malgun Gothic" pitchFamily="34" charset="-122"/>
                 <a:cs typeface="Malgun Gothic" pitchFamily="34" charset="-120"/>
               </a:rPr>
-              <a:t>크레인 작업표준신호</a:t>
+              <a:t>크레인 표준신호를 손 모양으로 재해석 (표준은 팔 동작, 서행 · 확인 완료는 다름)</a:t>
             </a:r>
             <a:endParaRPr lang="ko-KR" sz="1200" dirty="0"/>
           </a:p>
@@ -9101,7 +9091,7 @@
                 <a:ea typeface="Malgun Gothic" pitchFamily="34" charset="-122"/>
                 <a:cs typeface="Malgun Gothic" pitchFamily="34" charset="-120"/>
               </a:rPr>
-              <a:t>손 관절: KPI 촬영 데이터(RPi5 Camera Module 3)에서 추출한 실측 21점. 주황 점은 편 손가락 끝, 아래 줄은 정답일 때 picar 동작.</a:t>
+              <a:t>손 관절: KPI 촬영 데이터(RPi5 Camera Module 3)에서 추출한 실측 21점. 주황 점은 편 손가락 끝, 아래 줄은 정답일 때 picar 동작. 학습 데이터는 공개 ASL 지문자 데이터셋 2종(ODbL · MIT)에서 손 모양만 빌려 썼습니다(뜻은 무관).</a:t>
             </a:r>
             <a:endParaRPr lang="ko-KR" sz="1050" dirty="0"/>
           </a:p>
@@ -10627,7 +10617,7 @@
                 <a:ea typeface="Malgun Gothic" pitchFamily="34" charset="-122"/>
                 <a:cs typeface="Malgun Gothic" pitchFamily="34" charset="-120"/>
               </a:rPr>
-              <a:t>판정 성능 KPI 5개 모두 달성, 다른 신호로 읽은 경우 0건</a:t>
+              <a:t>판정 KPI 5개 충족(3개 잠정), 잘못 읽은 경우 0건</a:t>
             </a:r>
             <a:endParaRPr lang="ko-KR" sz="3000" dirty="0"/>
           </a:p>
@@ -11507,7 +11497,7 @@
                 <a:ea typeface="Malgun Gothic" pitchFamily="34" charset="-122"/>
                 <a:cs typeface="Malgun Gothic" pitchFamily="34" charset="-120"/>
               </a:rPr>
-              <a:t>정지 → 다른 신호, 30시도</a:t>
+              <a:t>정지 30시도, 상한 11.4%</a:t>
             </a:r>
             <a:endParaRPr lang="ko-KR" sz="900" dirty="0"/>
           </a:p>
@@ -11624,7 +11614,7 @@
                 <a:ea typeface="Malgun Gothic" pitchFamily="34" charset="-122"/>
                 <a:cs typeface="Malgun Gothic" pitchFamily="34" charset="-120"/>
               </a:rPr>
-              <a:t>사람별 정답률 97.1 · 94.3 · 94.3%. 정답률 · 미판정률은 95% 신뢰구간이 목표선에 걸쳐 있어 ‘잠정 달성’으로 기록(06 §2-1).</a:t>
+              <a:t>사람별 정답률 97.1 · 94.3 · 94.3%. 정답률 · 미판정률은 95% 신뢰구간이 목표선에 걸치고, 치명 오분류 0건은 정지 30시도뿐이라 95% 상한이 11.4%여서, 이 3개를 ‘잠정 달성’으로 기록(06 §2-1).</a:t>
             </a:r>
             <a:endParaRPr lang="ko-KR" sz="1000" dirty="0"/>
           </a:p>
@@ -12249,7 +12239,7 @@
                 <a:ea typeface="Malgun Gothic" pitchFamily="34" charset="-122"/>
                 <a:cs typeface="Malgun Gothic" pitchFamily="34" charset="-120"/>
               </a:rPr>
-              <a:t>참고: 동작 완료까지 1.089초, 손을 멈춘 뒤 동작 완료까지 추정 1.2~1.4초로 원래 정의로도 목표 2.0초 안입니다. 측정 2026-10-02.</a:t>
+              <a:t>참고: picar 주행을 뺀 동작 완료까지 1.089초. 240fps 슬로모션 7시도로 재면 손을 멈춘 뒤 반응 시작 0.14~0.24초, 동작 완료(picar 주행 제외) 약 1.11~1.24초. 측정 2026-10-02.</a:t>
             </a:r>
             <a:endParaRPr lang="ko-KR" sz="1000" dirty="0"/>
           </a:p>

--- a/document/21_발표자료.pptx
+++ b/document/21_발표자료.pptx
@@ -1395,7 +1395,7 @@
           <a:lstStyle/>
           <a:p>
             <a:r>
-              <a:t>한계입니다. 미판정 10건 중 7건이 손을 오른쪽으로 기울인 자세여서, 기울기 보정을 새 데이터로 확인할 계획입니다. 평가자가 모두 팀원이라 현장 작업자 의견은 시연 자리에서 받고, 오분류 0%는 표본상 1.8% 이하, 치명 오분류 0건은 11.4% 이하로 읽어야 해서 시행 수를 늘릴 계획입니다. 역할은 오른쪽과 같습니다. 감사합니다. (역할 문구는 발표 전 팀 확인)</a:t>
+              <a:t>한계입니다. 미판정 10건 중 7건이 손을 오른쪽으로 기울인 자세여서, 기울기 보정을 새 데이터로 확인할 계획입니다. 평가자가 모두 팀원이라 현장 작업자 의견은 시연 자리에서 받고, 오분류 0%는 표본상 1.8% 이하, 치명 오분류 0건은 11.4% 이하로 읽어야 해서 시행 수를 늘릴 계획입니다. 역할은 오른쪽과 같습니다. 감사합니다.</a:t>
             </a:r>
           </a:p>
         </p:txBody>
@@ -1831,7 +1831,7 @@
           <a:lstStyle/>
           <a:p>
             <a:r>
-              <a:t>수신호는 크레인 작업표준신호지침의 5종을 손 모양으로 재해석하고 후진과 주의를 더한 7종입니다. 표준은 팔 동작이라 그대로 옮긴 것은 아니고, 서행과 확인 완료는 표준 동작과 다릅니다. 학습 데이터는 공개 ASL 지문자 데이터셋에서 손 모양만 빌려 왔습니다. 그림은 실제 측정 촬영에서 뽑은 손 관절이고, 주황 점이 편 손가락 끝입니다. 따라 하기 어렵거나 공개 데이터가 없는 손모양은 바꿨습니다. 예를 들어 확인 완료는 엄지 세우기 대신 주먹입니다.</a:t>
+              <a:t>수신호는 크레인 작업표준신호지침의 5종을 손 모양으로 재해석하고 후진과 주의를 더한 7종입니다. 표준은 팔 동작이라 그대로 옮긴 것은 아니고, 서행과 확인 완료는 표준 동작과 다릅니다. 학습 데이터는 공개 ASL 지문자 데이터셋과 손가락 세기 데이터셋에서 손 모양만 빌려 왔습니다. 그림은 실제 측정 촬영에서 뽑은 손 관절이고, 주황 점이 편 손가락 끝입니다. 따라 하기 어렵거나 공개 데이터가 없는 손모양은 바꿨습니다. 예를 들어 확인 완료는 엄지 세우기 대신 주먹입니다.</a:t>
             </a:r>
           </a:p>
         </p:txBody>
@@ -3159,6 +3159,10 @@
             <a:prstDash val="solid"/>
           </a:ln>
         </p:spPr>
+        <p:txBody>
+          <a:bodyPr/>
+          <a:p/>
+        </p:txBody>
       </p:sp>
       <p:sp>
         <p:nvSpPr>
@@ -3340,6 +3344,10 @@
             <a:prstDash val="solid"/>
           </a:ln>
         </p:spPr>
+        <p:txBody>
+          <a:bodyPr/>
+          <a:p/>
+        </p:txBody>
       </p:sp>
       <p:pic>
         <p:nvPicPr>
@@ -3470,6 +3478,10 @@
             <a:prstDash val="solid"/>
           </a:ln>
         </p:spPr>
+        <p:txBody>
+          <a:bodyPr/>
+          <a:p/>
+        </p:txBody>
       </p:sp>
       <p:pic>
         <p:nvPicPr>
@@ -3600,6 +3612,10 @@
             <a:prstDash val="solid"/>
           </a:ln>
         </p:spPr>
+        <p:txBody>
+          <a:bodyPr/>
+          <a:p/>
+        </p:txBody>
       </p:sp>
       <p:pic>
         <p:nvPicPr>
@@ -3730,6 +3746,10 @@
             <a:prstDash val="solid"/>
           </a:ln>
         </p:spPr>
+        <p:txBody>
+          <a:bodyPr/>
+          <a:p/>
+        </p:txBody>
       </p:sp>
       <p:sp>
         <p:nvSpPr>
@@ -3842,7 +3862,28 @@
                 <a:ea typeface="Malgun Gothic" pitchFamily="34" charset="-122"/>
                 <a:cs typeface="Malgun Gothic" pitchFamily="34" charset="-120"/>
               </a:rPr>
-              <a:t>팀장 · AI Hand · picar 하드웨어, 통합 시험</a:t>
+              <a:t>팀장 · AI Hand·picar 하드웨어</a:t>
+            </a:r>
+            <a:br>
+              <a:rPr lang="ko-KR" altLang="en-US" sz="1150" dirty="0">
+                <a:solidFill>
+                  <a:srgbClr val="94A3B8"/>
+                </a:solidFill>
+                <a:latin typeface="Malgun Gothic" pitchFamily="34" charset="0"/>
+                <a:ea typeface="Malgun Gothic" pitchFamily="34" charset="-122"/>
+                <a:cs typeface="Malgun Gothic" pitchFamily="34" charset="-120"/>
+              </a:rPr>
+            </a:br>
+            <a:r>
+              <a:rPr lang="ko-KR" altLang="en-US" sz="1150" dirty="0">
+                <a:solidFill>
+                  <a:srgbClr val="94A3B8"/>
+                </a:solidFill>
+                <a:latin typeface="Malgun Gothic" pitchFamily="34" charset="0"/>
+                <a:ea typeface="Malgun Gothic" pitchFamily="34" charset="-122"/>
+                <a:cs typeface="Malgun Gothic" pitchFamily="34" charset="-120"/>
+              </a:rPr>
+              <a:t>통합 시험·KPI 측정</a:t>
             </a:r>
             <a:endParaRPr lang="ko-KR" sz="1150" dirty="0"/>
           </a:p>
@@ -3920,7 +3961,7 @@
                 <a:ea typeface="Malgun Gothic" pitchFamily="34" charset="-122"/>
                 <a:cs typeface="Malgun Gothic" pitchFamily="34" charset="-120"/>
               </a:rPr>
-              <a:t>인식 · 판정 로직(vision), 화면 디자인</a:t>
+              <a:t>인식·판정 로직(vision) · 회원 DB · 화면 디자인</a:t>
             </a:r>
             <a:endParaRPr lang="ko-KR" sz="1150" dirty="0"/>
           </a:p>
@@ -3998,7 +4039,7 @@
                 <a:ea typeface="Malgun Gothic" pitchFamily="34" charset="-122"/>
                 <a:cs typeface="Malgun Gothic" pitchFamily="34" charset="-120"/>
               </a:rPr>
-              <a:t>웹 교육 화면 · 성능 측정 계획</a:t>
+              <a:t>웹 교육 화면 · KPI 집계 · 화면 캡처</a:t>
             </a:r>
             <a:endParaRPr lang="ko-KR" sz="1150" dirty="0"/>
           </a:p>
@@ -4076,7 +4117,28 @@
                 <a:ea typeface="Malgun Gothic" pitchFamily="34" charset="-122"/>
                 <a:cs typeface="Malgun Gothic" pitchFamily="34" charset="-120"/>
               </a:rPr>
-              <a:t>데이터 수집 · 요구사항 · DB · 결과보고서</a:t>
+              <a:t>학습 데이터 확보 · 요구사항·시나리오</a:t>
+            </a:r>
+            <a:br>
+              <a:rPr lang="ko-KR" altLang="en-US" sz="1150" dirty="0">
+                <a:solidFill>
+                  <a:srgbClr val="94A3B8"/>
+                </a:solidFill>
+                <a:latin typeface="Malgun Gothic" pitchFamily="34" charset="0"/>
+                <a:ea typeface="Malgun Gothic" pitchFamily="34" charset="-122"/>
+                <a:cs typeface="Malgun Gothic" pitchFamily="34" charset="-120"/>
+              </a:rPr>
+            </a:br>
+            <a:r>
+              <a:rPr lang="ko-KR" altLang="en-US" sz="1150" dirty="0">
+                <a:solidFill>
+                  <a:srgbClr val="94A3B8"/>
+                </a:solidFill>
+                <a:latin typeface="Malgun Gothic" pitchFamily="34" charset="0"/>
+                <a:ea typeface="Malgun Gothic" pitchFamily="34" charset="-122"/>
+                <a:cs typeface="Malgun Gothic" pitchFamily="34" charset="-120"/>
+              </a:rPr>
+              <a:t>DB 연동 · 결과보고서</a:t>
             </a:r>
             <a:endParaRPr lang="ko-KR" sz="1150" dirty="0"/>
           </a:p>
@@ -7388,6 +7450,10 @@
             <a:prstDash val="solid"/>
           </a:ln>
         </p:spPr>
+        <p:txBody>
+          <a:bodyPr/>
+          <a:p/>
+        </p:txBody>
       </p:sp>
       <p:sp>
         <p:nvSpPr>
@@ -7647,6 +7713,10 @@
             <a:prstDash val="solid"/>
           </a:ln>
         </p:spPr>
+        <p:txBody>
+          <a:bodyPr/>
+          <a:p/>
+        </p:txBody>
       </p:sp>
       <p:sp>
         <p:nvSpPr>
@@ -7852,6 +7922,10 @@
             <a:prstDash val="solid"/>
           </a:ln>
         </p:spPr>
+        <p:txBody>
+          <a:bodyPr/>
+          <a:p/>
+        </p:txBody>
       </p:sp>
       <p:sp>
         <p:nvSpPr>
@@ -8057,6 +8131,10 @@
             <a:prstDash val="solid"/>
           </a:ln>
         </p:spPr>
+        <p:txBody>
+          <a:bodyPr/>
+          <a:p/>
+        </p:txBody>
       </p:sp>
       <p:sp>
         <p:nvSpPr>
@@ -8262,6 +8340,10 @@
             <a:prstDash val="solid"/>
           </a:ln>
         </p:spPr>
+        <p:txBody>
+          <a:bodyPr/>
+          <a:p/>
+        </p:txBody>
       </p:sp>
       <p:sp>
         <p:nvSpPr>
@@ -8467,6 +8549,10 @@
             <a:prstDash val="solid"/>
           </a:ln>
         </p:spPr>
+        <p:txBody>
+          <a:bodyPr/>
+          <a:p/>
+        </p:txBody>
       </p:sp>
       <p:sp>
         <p:nvSpPr>
@@ -8672,6 +8758,10 @@
             <a:prstDash val="solid"/>
           </a:ln>
         </p:spPr>
+        <p:txBody>
+          <a:bodyPr/>
+          <a:p/>
+        </p:txBody>
       </p:sp>
       <p:sp>
         <p:nvSpPr>
@@ -8877,6 +8967,10 @@
             <a:prstDash val="solid"/>
           </a:ln>
         </p:spPr>
+        <p:txBody>
+          <a:bodyPr/>
+          <a:p/>
+        </p:txBody>
       </p:sp>
       <p:sp>
         <p:nvSpPr>
@@ -9091,7 +9185,7 @@
                 <a:ea typeface="Malgun Gothic" pitchFamily="34" charset="-122"/>
                 <a:cs typeface="Malgun Gothic" pitchFamily="34" charset="-120"/>
               </a:rPr>
-              <a:t>손 관절: KPI 촬영 데이터(RPi5 Camera Module 3)에서 추출한 실측 21점. 주황 점은 편 손가락 끝, 아래 줄은 정답일 때 picar 동작. 학습 데이터는 공개 ASL 지문자 데이터셋 2종(ODbL · MIT)에서 손 모양만 빌려 썼습니다(뜻은 무관).</a:t>
+              <a:t>손 관절: KPI 촬영 데이터(RPi5 Camera Module 3)에서 추출한 실측 21점. 주황 점은 편 손가락 끝, 아래 줄은 정답일 때 picar 동작. 학습 데이터는 공개 데이터셋 2종(ASL 지문자 ODbL · 손가락 세기 MIT)에서 손 모양만 빌려 썼습니다(뜻은 무관).</a:t>
             </a:r>
             <a:endParaRPr lang="ko-KR" sz="1050" dirty="0"/>
           </a:p>

--- a/document/21_발표자료.pptx
+++ b/document/21_발표자료.pptx
@@ -1481,10 +1481,8 @@
           <a:lstStyle/>
           <a:p>
             <a:r>
-              <a:rPr lang="en-US" dirty="0"/>
-              <a:t>현장에서는 작업자마다 수신호를 다르게 이해해서 소통 오류가 사고로 이어질 수 있습니다. 그런데 지금 교육은 영상과 인쇄물이라, 학습자가 실제로 따라 할 수 있는지, 누가 어떤 신호에 약한지 알 수 없습니다. 그래서 보여 주고, 판정하고, 몸으로 돌려주고, 기록하는 것을 목표로 잡았습니다.</a:t>
-            </a:r>
-            <a:endParaRPr lang="en-US" dirty="0"/>
+              <a:t>크레인 작업은 법으로 정한 신호로 해야 합니다. 그런데 타워크레인 양중작업 재해의 13%가 신호를 잘못 알거나 순서를 지키지 않아서 생겼고, 2023년에도 크레인류 사고로 23명이 숨졌습니다. 신호수는 8시간 이론 위주 교육만 받고 실기 평가가 없어서, 학습자가 실제로 따라 할 수 있는지, 누가 어떤 신호에 약한지 알 수 없습니다. 그래서 보여 주고, 판정하고, 몸으로 돌려주고, 기록하는 것을 목표로 잡았습니다.</a:t>
+            </a:r>
           </a:p>
         </p:txBody>
       </p:sp>
@@ -4471,7 +4469,7 @@
                 <a:ea typeface="Malgun Gothic" pitchFamily="34" charset="-122"/>
                 <a:cs typeface="Malgun Gothic" pitchFamily="34" charset="-120"/>
               </a:rPr>
-              <a:t>현장에서는 작업자마다 수신호를 다르게 이해하고 표현해서, 소통 오류가 안전사고로 이어질 수 있습니다.</a:t>
+              <a:t>크레인 작업은 법으로 정한 신호로 해야 하지만, 타워크레인 양중작업 재해의 13.0%(343건 중 45건)가 신호체계 미준수에서 생겼습니다.</a:t>
             </a:r>
             <a:endParaRPr lang="ko-KR" sz="1600" dirty="0"/>
           </a:p>
@@ -4511,7 +4509,47 @@
                 <a:ea typeface="Malgun Gothic" pitchFamily="34" charset="-122"/>
                 <a:cs typeface="Malgun Gothic" pitchFamily="34" charset="-120"/>
               </a:rPr>
-              <a:t>지금의 교육은 영상과 인쇄물이라 학습자가 정확히 따라 할 수 있는지 확인할 방법이 없고, 손가락이 겹치는 입체 손모양은 평면 화면으로 잘 전달되지 않습니다.</a:t>
+              <a:t>신호수는 8시간 이론 위주 교육만 받고 실기 평가가 없습니다. 영상·인쇄물로는 정확히 따라 할 수 있는지 확인할 방법이 없습니다.</a:t>
+            </a:r>
+            <a:endParaRPr lang="ko-KR" sz="1600" dirty="0"/>
+          </a:p>
+          <a:p>
+            <a:pPr indent="0" marL="0">
+              <a:lnSpc>
+                <a:spcPct val="125000"/>
+              </a:lnSpc>
+              <a:buNone/>
+            </a:pPr>
+            <a:r>
+              <a:rPr lang="ko-KR" altLang="en-US" sz="800" dirty="0">
+                <a:solidFill>
+                  <a:srgbClr val="F1F5F9"/>
+                </a:solidFill>
+                <a:latin typeface="Malgun Gothic" pitchFamily="34" charset="0"/>
+                <a:ea typeface="Malgun Gothic" pitchFamily="34" charset="-122"/>
+                <a:cs typeface="Malgun Gothic" pitchFamily="34" charset="-120"/>
+              </a:rPr>
+              <a:t> </a:t>
+            </a:r>
+            <a:endParaRPr lang="ko-KR" sz="1600" dirty="0"/>
+          </a:p>
+          <a:p>
+            <a:pPr indent="0" marL="0">
+              <a:lnSpc>
+                <a:spcPct val="125000"/>
+              </a:lnSpc>
+              <a:buNone/>
+            </a:pPr>
+            <a:r>
+              <a:rPr lang="ko-KR" altLang="en-US" sz="1000" dirty="0">
+                <a:solidFill>
+                  <a:srgbClr val="94A3B8"/>
+                </a:solidFill>
+                <a:latin typeface="Malgun Gothic" pitchFamily="34" charset="0"/>
+                <a:ea typeface="Malgun Gothic" pitchFamily="34" charset="-122"/>
+                <a:cs typeface="Malgun Gothic" pitchFamily="34" charset="-120"/>
+              </a:rPr>
+              <a:t>근거: 안전보건규칙 제40조 · 임현무·김승호(2022) · 고용노동부(2023)</a:t>
             </a:r>
             <a:endParaRPr lang="ko-KR" sz="1600" dirty="0"/>
           </a:p>
@@ -12334,6 +12372,26 @@
                 <a:cs typeface="Malgun Gothic" pitchFamily="34" charset="-120"/>
               </a:rPr>
               <a:t>참고: picar 주행을 뺀 동작 완료까지 1.089초. 240fps 슬로모션 7시도로 재면 손을 멈춘 뒤 반응 시작 0.14~0.24초, 동작 완료(picar 주행 제외) 약 1.11~1.24초. 측정 2026-10-02.</a:t>
+            </a:r>
+            <a:endParaRPr lang="ko-KR" sz="1000" dirty="0"/>
+          </a:p>
+          <a:p>
+            <a:pPr indent="0" marL="0">
+              <a:lnSpc>
+                <a:spcPct val="115000"/>
+              </a:lnSpc>
+              <a:buNone/>
+            </a:pPr>
+            <a:r>
+              <a:rPr lang="ko-KR" altLang="en-US" sz="1000" dirty="0">
+                <a:solidFill>
+                  <a:srgbClr val="94A3B8"/>
+                </a:solidFill>
+                <a:latin typeface="Malgun Gothic" pitchFamily="34" charset="0"/>
+                <a:ea typeface="Malgun Gothic" pitchFamily="34" charset="-122"/>
+                <a:cs typeface="Malgun Gothic" pitchFamily="34" charset="-120"/>
+              </a:rPr>
+              <a:t>목표 1.0초 근거: 응답이 1초를 넘으면 사용자의 생각 흐름이 끊긴다(Nielsen, Usability Engineering, 1993). 물리 피드백 2.0초 등 나머지 목표는 팀이 정한 값.</a:t>
             </a:r>
             <a:endParaRPr lang="ko-KR" sz="1000" dirty="0"/>
           </a:p>

--- a/document/21_발표자료.pptx
+++ b/document/21_발표자료.pptx
@@ -1,24 +1,25 @@
 
 <file path=ppt/presentation.xml><?xml version="1.0" encoding="utf-8"?>
-<p:presentation xmlns:a="http://schemas.openxmlformats.org/drawingml/2006/main" xmlns:r="http://schemas.openxmlformats.org/officeDocument/2006/relationships" xmlns:p="http://schemas.openxmlformats.org/presentationml/2006/main" saveSubsetFonts="1" autoCompressPictures="0">
+<p:presentation xmlns:a="http://schemas.openxmlformats.org/drawingml/2006/main" xmlns:r="http://schemas.openxmlformats.org/officeDocument/2006/relationships" xmlns:p="http://schemas.openxmlformats.org/presentationml/2006/main" xmlns:p14="http://schemas.microsoft.com/office/powerpoint/2010/main" saveSubsetFonts="1" autoCompressPictures="0">
   <p:sldMasterIdLst>
-    <p:sldMasterId id="2147483648" r:id="rId1"/>
+    <p:sldMasterId id="2147483650" r:id="rId3"/>
   </p:sldMasterIdLst>
+  <p:notesMasterIdLst>
+    <p:notesMasterId r:id="rId5"/>
+  </p:notesMasterIdLst>
   <p:sldIdLst>
-    <p:sldId id="256" r:id="rId2"/>
-    <p:sldId id="257" r:id="rId3"/>
-    <p:sldId id="258" r:id="rId4"/>
-    <p:sldId id="259" r:id="rId5"/>
-    <p:sldId id="260" r:id="rId6"/>
-    <p:sldId id="261" r:id="rId7"/>
-    <p:sldId id="262" r:id="rId8"/>
-    <p:sldId id="263" r:id="rId9"/>
-    <p:sldId id="264" r:id="rId10"/>
-    <p:sldId id="265" r:id="rId11"/>
+    <p:sldId id="256" r:id="rId7"/>
+    <p:sldId id="257" r:id="rId8"/>
+    <p:sldId id="258" r:id="rId10"/>
+    <p:sldId id="259" r:id="rId12"/>
+    <p:sldId id="260" r:id="rId14"/>
+    <p:sldId id="261" r:id="rId16"/>
+    <p:sldId id="262" r:id="rId18"/>
+    <p:sldId id="263" r:id="rId20"/>
+    <p:sldId id="264" r:id="rId22"/>
+    <p:sldId id="265" r:id="rId24"/>
   </p:sldIdLst>
-  <p:notesMasterIdLst>
-    <p:notesMasterId r:id="rId12"/>
-  </p:notesMasterIdLst>
+  <p:notesMasterIdLst/>
   <p:sldSz cx="12192000" cy="6858000"/>
   <p:notesSz cx="6858000" cy="12192000"/>
   <p:defaultTextStyle>
@@ -2438,7 +2439,7 @@
 </file>
 
 <file path=ppt/slides/slide1.xml><?xml version="1.0" encoding="utf-8"?>
-<p:sld xmlns:a="http://schemas.openxmlformats.org/drawingml/2006/main" xmlns:r="http://schemas.openxmlformats.org/officeDocument/2006/relationships" xmlns:p="http://schemas.openxmlformats.org/presentationml/2006/main">
+<p:sld xmlns:a="http://schemas.openxmlformats.org/drawingml/2006/main" xmlns:r="http://schemas.openxmlformats.org/officeDocument/2006/relationships" xmlns:p="http://schemas.openxmlformats.org/presentationml/2006/main" xmlns:p14="http://schemas.microsoft.com/office/powerpoint/2010/main">
   <p:cSld name="Slide 1">
     <p:bg>
       <p:bgPr>
@@ -2469,8 +2470,8 @@
         </p:nvSpPr>
         <p:spPr>
           <a:xfrm>
-            <a:off x="548640" y="566928"/>
-            <a:ext cx="118872" cy="118872"/>
+            <a:off x="548640" y="567055"/>
+            <a:ext cx="118745" cy="118745"/>
           </a:xfrm>
           <a:prstGeom prst="rect">
             <a:avLst/>
@@ -2698,7 +2699,7 @@
         </p:nvSpPr>
         <p:spPr>
           <a:xfrm>
-            <a:off x="713232" y="4892040"/>
+            <a:off x="713105" y="4892040"/>
             <a:ext cx="1463040" cy="274320"/>
           </a:xfrm>
           <a:prstGeom prst="rect">
@@ -2737,7 +2738,7 @@
         </p:nvSpPr>
         <p:spPr>
           <a:xfrm>
-            <a:off x="713232" y="5166360"/>
+            <a:off x="713105" y="5166360"/>
             <a:ext cx="1508760" cy="411480"/>
           </a:xfrm>
           <a:prstGeom prst="rect">
@@ -2801,7 +2802,7 @@
         </p:nvSpPr>
         <p:spPr>
           <a:xfrm>
-            <a:off x="2587752" y="4892040"/>
+            <a:off x="2587625" y="4892040"/>
             <a:ext cx="1463040" cy="274320"/>
           </a:xfrm>
           <a:prstGeom prst="rect">
@@ -2840,7 +2841,7 @@
         </p:nvSpPr>
         <p:spPr>
           <a:xfrm>
-            <a:off x="2587752" y="5166360"/>
+            <a:off x="2587625" y="5166360"/>
             <a:ext cx="1508760" cy="411480"/>
           </a:xfrm>
           <a:prstGeom prst="rect">
@@ -2904,7 +2905,7 @@
         </p:nvSpPr>
         <p:spPr>
           <a:xfrm>
-            <a:off x="4462272" y="4892040"/>
+            <a:off x="4462145" y="4892040"/>
             <a:ext cx="1463040" cy="274320"/>
           </a:xfrm>
           <a:prstGeom prst="rect">
@@ -2943,7 +2944,7 @@
         </p:nvSpPr>
         <p:spPr>
           <a:xfrm>
-            <a:off x="4462272" y="5166360"/>
+            <a:off x="4462145" y="5166360"/>
             <a:ext cx="1508760" cy="411480"/>
           </a:xfrm>
           <a:prstGeom prst="rect">
@@ -2983,33 +2984,65 @@
         <p:spPr>
           <a:xfrm>
             <a:off x="548640" y="6035040"/>
-            <a:ext cx="5669280" cy="320040"/>
-          </a:xfrm>
-          <a:prstGeom prst="rect">
-            <a:avLst/>
-          </a:prstGeom>
-          <a:noFill/>
-          <a:ln/>
-        </p:spPr>
-        <p:txBody>
-          <a:bodyPr wrap="square" lIns="0" tIns="0" rIns="0" bIns="0" rtlCol="0" anchor="ctr"/>
-          <a:lstStyle/>
-          <a:p>
-            <a:pPr indent="0" marL="0">
-              <a:buNone/>
-            </a:pPr>
-            <a:r>
-              <a:rPr lang="ko-KR" altLang="en-US" sz="1200" dirty="0">
+            <a:ext cx="5669915" cy="320675"/>
+          </a:xfrm>
+          <a:prstGeom prst="rect">
+            <a:avLst/>
+          </a:prstGeom>
+          <a:noFill/>
+          <a:ln/>
+        </p:spPr>
+        <p:txBody>
+          <a:bodyPr wrap="square" lIns="0" tIns="0" rIns="0" bIns="0" numCol="1" vert="horz" anchor="ctr">
+            <a:noAutofit/>
+          </a:bodyPr>
+          <a:lstStyle/>
+          <a:p>
+            <a:pPr marL="0" indent="0">
+              <a:buFontTx/>
+              <a:buNone/>
+            </a:pPr>
+            <a:r>
+              <a:rPr lang="ko-KR" altLang="en-US" sz="1600" b="1">
                 <a:solidFill>
                   <a:srgbClr val="94A3B8"/>
                 </a:solidFill>
-                <a:latin typeface="Malgun Gothic" pitchFamily="34" charset="0"/>
-                <a:ea typeface="Malgun Gothic" pitchFamily="34" charset="-122"/>
-                <a:cs typeface="Malgun Gothic" pitchFamily="34" charset="-120"/>
-              </a:rPr>
-              <a:t>송승호(팀장)  ·  이동혁  ·  조은수  ·  김지훈</a:t>
-            </a:r>
-            <a:endParaRPr lang="ko-KR" sz="1200" dirty="0"/>
+                <a:latin typeface="Malgun Gothic" charset="0"/>
+                <a:ea typeface="Malgun Gothic" charset="0"/>
+                <a:cs typeface="Malgun Gothic" charset="0"/>
+              </a:rPr>
+              <a:t>발표자 </a:t>
+            </a:r>
+            <a:r>
+              <a:rPr lang="ko-KR" altLang="en-US" sz="1600" b="1">
+                <a:solidFill>
+                  <a:srgbClr val="94A3B8"/>
+                </a:solidFill>
+                <a:latin typeface="Malgun Gothic" charset="0"/>
+                <a:ea typeface="Malgun Gothic" charset="0"/>
+                <a:cs typeface="Malgun Gothic" charset="0"/>
+              </a:rPr>
+              <a:t>: </a:t>
+            </a:r>
+            <a:r>
+              <a:rPr lang="ko-KR" altLang="en-US" sz="1600" b="1">
+                <a:solidFill>
+                  <a:srgbClr val="94A3B8"/>
+                </a:solidFill>
+                <a:latin typeface="Malgun Gothic" charset="0"/>
+                <a:ea typeface="Malgun Gothic" charset="0"/>
+                <a:cs typeface="Malgun Gothic" charset="0"/>
+              </a:rPr>
+              <a:t>김지훈</a:t>
+            </a:r>
+            <a:endParaRPr lang="ko-KR" altLang="en-US" sz="1600" b="1">
+              <a:solidFill>
+                <a:srgbClr val="94A3B8"/>
+              </a:solidFill>
+              <a:latin typeface="Malgun Gothic" charset="0"/>
+              <a:ea typeface="Malgun Gothic" charset="0"/>
+              <a:cs typeface="Malgun Gothic" charset="0"/>
+            </a:endParaRPr>
           </a:p>
         </p:txBody>
       </p:sp>
@@ -3021,8 +3054,8 @@
         </p:nvSpPr>
         <p:spPr>
           <a:xfrm>
-            <a:off x="6373368" y="1527048"/>
-            <a:ext cx="5342839" cy="3069355"/>
+            <a:off x="6373495" y="1527175"/>
+            <a:ext cx="5342890" cy="3069590"/>
           </a:xfrm>
           <a:prstGeom prst="rect">
             <a:avLst/>
@@ -3040,7 +3073,7 @@
       </p:sp>
       <p:pic>
         <p:nvPicPr>
-          <p:cNvPr id="18" name="Image 0" descr="C:/SafeSign_PhysicalAI/services/portal/frontend/media/station-judging-poster.jpg">    </p:cNvPr>
+          <p:cNvPr id="18" name="Image 0">    </p:cNvPr>
           <p:cNvPicPr>
             <a:picLocks noChangeAspect="1"/>
           </p:cNvPicPr>
@@ -3055,7 +3088,7 @@
         <p:spPr>
           <a:xfrm>
             <a:off x="6446520" y="1600200"/>
-            <a:ext cx="5196535" cy="2923051"/>
+            <a:ext cx="5196840" cy="2922905"/>
           </a:xfrm>
           <a:prstGeom prst="rect">
             <a:avLst/>
@@ -3070,8 +3103,8 @@
         </p:nvSpPr>
         <p:spPr>
           <a:xfrm>
-            <a:off x="6446520" y="4706131"/>
-            <a:ext cx="5196535" cy="274320"/>
+            <a:off x="6446520" y="4705985"/>
+            <a:ext cx="5196840" cy="274320"/>
           </a:xfrm>
           <a:prstGeom prst="rect">
             <a:avLst/>
@@ -3106,6 +3139,21 @@
   <p:clrMapOvr>
     <a:masterClrMapping/>
   </p:clrMapOvr>
+  <mc:AlternateContent xmlns:mc="http://schemas.openxmlformats.org/markup-compatibility/2006">
+    <mc:Choice xmlns:p14="http://schemas.microsoft.com/office/powerpoint/2010/main" Requires="p14">
+      <p:transition spd="slow" p14:dur="2000"/>
+    </mc:Choice>
+    <mc:Fallback>
+      <p:transition spd="slow"/>
+    </mc:Fallback>
+  </mc:AlternateContent>
+  <p:timing>
+    <p:tnLst>
+      <p:par>
+        <p:cTn id="1" dur="indefinite" restart="never" nodeType="tmRoot"/>
+      </p:par>
+    </p:tnLst>
+  </p:timing>
 </p:sld>
 </file>
 
@@ -12405,7 +12453,7 @@
 </p:sld>
 </file>
 
-<file path=ppt/theme/theme1.xml><?xml version="1.0" encoding="utf-8"?>
+<file path=ppt/theme/theme2.xml><?xml version="1.0" encoding="utf-8"?>
 <a:theme xmlns:a="http://schemas.openxmlformats.org/drawingml/2006/main" name="Office Theme">
   <a:themeElements>
     <a:clrScheme name="Office">
